--- a/GOTOVO2.pptx
+++ b/GOTOVO2.pptx
@@ -21,12 +21,19 @@
   <p:notesSz cx="6858000" cy="12192000"/>
   <p:embeddedFontLst>
     <p:embeddedFont>
-      <p:font typeface="DM Sans" panose="020F0502020204030204" pitchFamily="2" charset="0"/>
+      <p:font typeface="Calibri" panose="020F0502020204030204" pitchFamily="34" charset="0"/>
       <p:regular r:id="rId11"/>
+      <p:bold r:id="rId12"/>
+      <p:italic r:id="rId13"/>
+      <p:boldItalic r:id="rId14"/>
+    </p:embeddedFont>
+    <p:embeddedFont>
+      <p:font typeface="DM Sans" panose="020B0604020202020204" charset="0"/>
+      <p:regular r:id="rId15"/>
     </p:embeddedFont>
     <p:embeddedFont>
       <p:font typeface="DM Sans SemiBold" panose="020B0604020202020204" charset="0"/>
-      <p:regular r:id="rId12"/>
+      <p:regular r:id="rId16"/>
     </p:embeddedFont>
   </p:embeddedFontLst>
   <p:defaultTextStyle>
@@ -2200,10 +2207,10 @@
           <p:nvPr/>
         </p:nvPicPr>
         <p:blipFill>
-          <a:blip>
+          <a:blip r:embed="rId3">
             <a:extLst>
               <a:ext uri="{96DAC541-7B7A-43D3-8B79-37D633B846F1}">
-                <asvg:svgBlip xmlns:asvg="http://schemas.microsoft.com/office/drawing/2016/SVG/main" r:embed="rId3"/>
+                <asvg:svgBlip xmlns:asvg="http://schemas.microsoft.com/office/drawing/2016/SVG/main" r:embed="rId4"/>
               </a:ext>
             </a:extLst>
           </a:blip>
@@ -3387,167 +3394,7 @@
           <p:nvPr/>
         </p:nvPicPr>
         <p:blipFill>
-          <a:blip>
-            <a:extLst>
-              <a:ext uri="{96DAC541-7B7A-43D3-8B79-37D633B846F1}">
-                <asvg:svgBlip xmlns:asvg="http://schemas.microsoft.com/office/drawing/2016/SVG/main" r:embed="rId3"/>
-              </a:ext>
-            </a:extLst>
-          </a:blip>
-          <a:stretch>
-            <a:fillRect/>
-          </a:stretch>
-        </p:blipFill>
-        <p:spPr>
-          <a:xfrm>
-            <a:off x="1006450" y="3248025"/>
-            <a:ext cx="255085" cy="255091"/>
-          </a:xfrm>
-          <a:prstGeom prst="rect">
-            <a:avLst/>
-          </a:prstGeom>
-        </p:spPr>
-      </p:pic>
-      <p:sp>
-        <p:nvSpPr>
-          <p:cNvPr id="9" name="Text 6"/>
-          <p:cNvSpPr/>
-          <p:nvPr/>
-        </p:nvSpPr>
-        <p:spPr>
-          <a:xfrm>
-            <a:off x="850482" y="3848100"/>
-            <a:ext cx="2708703" cy="236240"/>
-          </a:xfrm>
-          <a:prstGeom prst="rect">
-            <a:avLst/>
-          </a:prstGeom>
-          <a:noFill/>
-          <a:ln/>
-        </p:spPr>
-        <p:txBody>
-          <a:bodyPr wrap="none" lIns="0" tIns="0" rIns="0" bIns="0" rtlCol="0" anchor="t"/>
-          <a:lstStyle/>
-          <a:p>
-            <a:pPr marL="0" indent="0" algn="l">
-              <a:lnSpc>
-                <a:spcPct val="83000"/>
-              </a:lnSpc>
-              <a:buNone/>
-            </a:pPr>
-            <a:r>
-              <a:rPr lang="en-US" sz="1850" dirty="0">
-                <a:solidFill>
-                  <a:srgbClr val="161616"/>
-                </a:solidFill>
-                <a:latin typeface="DM Sans SemiBold" pitchFamily="34" charset="0"/>
-                <a:ea typeface="DM Sans SemiBold" pitchFamily="34" charset="-122"/>
-                <a:cs typeface="DM Sans SemiBold" pitchFamily="34" charset="-120"/>
-              </a:rPr>
-              <a:t>Персонаж 1: Катя, 16 лет</a:t>
-            </a:r>
-            <a:endParaRPr lang="en-US" sz="1850" dirty="0"/>
-          </a:p>
-        </p:txBody>
-      </p:sp>
-      <p:sp>
-        <p:nvSpPr>
-          <p:cNvPr id="10" name="Text 7"/>
-          <p:cNvSpPr/>
-          <p:nvPr/>
-        </p:nvSpPr>
-        <p:spPr>
-          <a:xfrm>
-            <a:off x="850482" y="4197747"/>
-            <a:ext cx="3118863" cy="1451372"/>
-          </a:xfrm>
-          <a:prstGeom prst="rect">
-            <a:avLst/>
-          </a:prstGeom>
-          <a:noFill/>
-          <a:ln/>
-        </p:spPr>
-        <p:txBody>
-          <a:bodyPr wrap="square" lIns="0" tIns="0" rIns="0" bIns="0" rtlCol="0" anchor="t">
-            <a:normAutofit/>
-          </a:bodyPr>
-          <a:lstStyle/>
-          <a:p>
-            <a:pPr marL="0" indent="0" algn="l">
-              <a:lnSpc>
-                <a:spcPct val="133000"/>
-              </a:lnSpc>
-              <a:buNone/>
-            </a:pPr>
-            <a:r>
-              <a:rPr lang="en-US" sz="1150" dirty="0">
-                <a:solidFill>
-                  <a:srgbClr val="161616"/>
-                </a:solidFill>
-                <a:latin typeface="DM Sans" pitchFamily="34" charset="0"/>
-                <a:ea typeface="DM Sans" pitchFamily="34" charset="-122"/>
-                <a:cs typeface="DM Sans" pitchFamily="34" charset="-120"/>
-              </a:rPr>
-              <a:t>Школьница, живёт рядом с магазином. Любит яркий мармелад на развес, покупает на карманные деньги (300–500 руб/мес). Узнаёт о новинках из TikTok и Stories. Приходит с подругами после школы.</a:t>
-            </a:r>
-            <a:endParaRPr lang="en-US" sz="1150" dirty="0"/>
-          </a:p>
-        </p:txBody>
-      </p:sp>
-      <p:sp>
-        <p:nvSpPr>
-          <p:cNvPr id="11" name="Shape 8"/>
-          <p:cNvSpPr/>
-          <p:nvPr/>
-        </p:nvSpPr>
-        <p:spPr>
-          <a:xfrm>
-            <a:off x="4347359" y="2903041"/>
-            <a:ext cx="3496877" cy="2935089"/>
-          </a:xfrm>
-          <a:prstGeom prst="roundRect">
-            <a:avLst>
-              <a:gd name="adj" fmla="val 2705"/>
-            </a:avLst>
-          </a:prstGeom>
-          <a:solidFill>
-            <a:srgbClr val="EAEBEE"/>
-          </a:solidFill>
-          <a:ln/>
-        </p:spPr>
-      </p:sp>
-      <p:sp>
-        <p:nvSpPr>
-          <p:cNvPr id="12" name="Shape 9"/>
-          <p:cNvSpPr/>
-          <p:nvPr/>
-        </p:nvSpPr>
-        <p:spPr>
-          <a:xfrm>
-            <a:off x="4536366" y="3092053"/>
-            <a:ext cx="567021" cy="567035"/>
-          </a:xfrm>
-          <a:prstGeom prst="roundRect">
-            <a:avLst>
-              <a:gd name="adj" fmla="val 13436976"/>
-            </a:avLst>
-          </a:prstGeom>
-          <a:solidFill>
-            <a:srgbClr val="CAD4E3"/>
-          </a:solidFill>
-          <a:ln/>
-        </p:spPr>
-      </p:sp>
-      <p:pic>
-        <p:nvPicPr>
-          <p:cNvPr id="13" name="Image 1" descr="preencoded.png"/>
-          <p:cNvPicPr>
-            <a:picLocks noChangeAspect="1"/>
-          </p:cNvPicPr>
-          <p:nvPr/>
-        </p:nvPicPr>
-        <p:blipFill>
-          <a:blip>
+          <a:blip r:embed="rId3">
             <a:extLst>
               <a:ext uri="{96DAC541-7B7A-43D3-8B79-37D633B846F1}">
                 <asvg:svgBlip xmlns:asvg="http://schemas.microsoft.com/office/drawing/2016/SVG/main" r:embed="rId4"/>
@@ -3560,7 +3407,7 @@
         </p:blipFill>
         <p:spPr>
           <a:xfrm>
-            <a:off x="4692334" y="3248025"/>
+            <a:off x="1006450" y="3248025"/>
             <a:ext cx="255085" cy="255091"/>
           </a:xfrm>
           <a:prstGeom prst="rect">
@@ -3570,14 +3417,56 @@
       </p:pic>
       <p:sp>
         <p:nvSpPr>
-          <p:cNvPr id="14" name="Text 10"/>
-          <p:cNvSpPr/>
-          <p:nvPr/>
-        </p:nvSpPr>
-        <p:spPr>
-          <a:xfrm>
-            <a:off x="4536366" y="3848100"/>
-            <a:ext cx="3118863" cy="472480"/>
+          <p:cNvPr id="9" name="Text 6"/>
+          <p:cNvSpPr/>
+          <p:nvPr/>
+        </p:nvSpPr>
+        <p:spPr>
+          <a:xfrm>
+            <a:off x="850482" y="3848100"/>
+            <a:ext cx="2708703" cy="236240"/>
+          </a:xfrm>
+          <a:prstGeom prst="rect">
+            <a:avLst/>
+          </a:prstGeom>
+          <a:noFill/>
+          <a:ln/>
+        </p:spPr>
+        <p:txBody>
+          <a:bodyPr wrap="none" lIns="0" tIns="0" rIns="0" bIns="0" rtlCol="0" anchor="t"/>
+          <a:lstStyle/>
+          <a:p>
+            <a:pPr marL="0" indent="0" algn="l">
+              <a:lnSpc>
+                <a:spcPct val="83000"/>
+              </a:lnSpc>
+              <a:buNone/>
+            </a:pPr>
+            <a:r>
+              <a:rPr lang="en-US" sz="1850" dirty="0">
+                <a:solidFill>
+                  <a:srgbClr val="161616"/>
+                </a:solidFill>
+                <a:latin typeface="DM Sans SemiBold" pitchFamily="34" charset="0"/>
+                <a:ea typeface="DM Sans SemiBold" pitchFamily="34" charset="-122"/>
+                <a:cs typeface="DM Sans SemiBold" pitchFamily="34" charset="-120"/>
+              </a:rPr>
+              <a:t>Персонаж 1: Катя, 16 лет</a:t>
+            </a:r>
+            <a:endParaRPr lang="en-US" sz="1850" dirty="0"/>
+          </a:p>
+        </p:txBody>
+      </p:sp>
+      <p:sp>
+        <p:nvSpPr>
+          <p:cNvPr id="10" name="Text 7"/>
+          <p:cNvSpPr/>
+          <p:nvPr/>
+        </p:nvSpPr>
+        <p:spPr>
+          <a:xfrm>
+            <a:off x="850482" y="4197747"/>
+            <a:ext cx="3118863" cy="1451372"/>
           </a:xfrm>
           <a:prstGeom prst="rect">
             <a:avLst/>
@@ -3593,6 +3482,146 @@
           <a:p>
             <a:pPr marL="0" indent="0" algn="l">
               <a:lnSpc>
+                <a:spcPct val="133000"/>
+              </a:lnSpc>
+              <a:buNone/>
+            </a:pPr>
+            <a:r>
+              <a:rPr lang="en-US" sz="1150" dirty="0">
+                <a:solidFill>
+                  <a:srgbClr val="161616"/>
+                </a:solidFill>
+                <a:latin typeface="DM Sans" pitchFamily="34" charset="0"/>
+                <a:ea typeface="DM Sans" pitchFamily="34" charset="-122"/>
+                <a:cs typeface="DM Sans" pitchFamily="34" charset="-120"/>
+              </a:rPr>
+              <a:t>Школьница, живёт рядом с магазином. Любит яркий мармелад на развес, покупает на карманные деньги (300–500 руб/мес). Узнаёт о новинках из TikTok и </a:t>
+            </a:r>
+            <a:r>
+              <a:rPr lang="ru-RU" sz="1150" dirty="0" err="1">
+                <a:solidFill>
+                  <a:srgbClr val="161616"/>
+                </a:solidFill>
+                <a:latin typeface="DM Sans" pitchFamily="34" charset="0"/>
+                <a:ea typeface="DM Sans" pitchFamily="34" charset="-122"/>
+                <a:cs typeface="DM Sans" pitchFamily="34" charset="-120"/>
+              </a:rPr>
+              <a:t>рилсах</a:t>
+            </a:r>
+            <a:r>
+              <a:rPr lang="en-US" sz="1150" dirty="0">
+                <a:solidFill>
+                  <a:srgbClr val="161616"/>
+                </a:solidFill>
+                <a:latin typeface="DM Sans" pitchFamily="34" charset="0"/>
+                <a:ea typeface="DM Sans" pitchFamily="34" charset="-122"/>
+                <a:cs typeface="DM Sans" pitchFamily="34" charset="-120"/>
+              </a:rPr>
+              <a:t>. Приходит с подругами после школы.</a:t>
+            </a:r>
+            <a:endParaRPr lang="en-US" sz="1150" dirty="0"/>
+          </a:p>
+        </p:txBody>
+      </p:sp>
+      <p:sp>
+        <p:nvSpPr>
+          <p:cNvPr id="11" name="Shape 8"/>
+          <p:cNvSpPr/>
+          <p:nvPr/>
+        </p:nvSpPr>
+        <p:spPr>
+          <a:xfrm>
+            <a:off x="4347359" y="2903041"/>
+            <a:ext cx="3496877" cy="2935089"/>
+          </a:xfrm>
+          <a:prstGeom prst="roundRect">
+            <a:avLst>
+              <a:gd name="adj" fmla="val 2705"/>
+            </a:avLst>
+          </a:prstGeom>
+          <a:solidFill>
+            <a:srgbClr val="EAEBEE"/>
+          </a:solidFill>
+          <a:ln/>
+        </p:spPr>
+      </p:sp>
+      <p:sp>
+        <p:nvSpPr>
+          <p:cNvPr id="12" name="Shape 9"/>
+          <p:cNvSpPr/>
+          <p:nvPr/>
+        </p:nvSpPr>
+        <p:spPr>
+          <a:xfrm>
+            <a:off x="4536366" y="3092053"/>
+            <a:ext cx="567021" cy="567035"/>
+          </a:xfrm>
+          <a:prstGeom prst="roundRect">
+            <a:avLst>
+              <a:gd name="adj" fmla="val 13436976"/>
+            </a:avLst>
+          </a:prstGeom>
+          <a:solidFill>
+            <a:srgbClr val="CAD4E3"/>
+          </a:solidFill>
+          <a:ln/>
+        </p:spPr>
+      </p:sp>
+      <p:pic>
+        <p:nvPicPr>
+          <p:cNvPr id="13" name="Image 1" descr="preencoded.png"/>
+          <p:cNvPicPr>
+            <a:picLocks noChangeAspect="1"/>
+          </p:cNvPicPr>
+          <p:nvPr/>
+        </p:nvPicPr>
+        <p:blipFill>
+          <a:blip r:embed="rId5">
+            <a:extLst>
+              <a:ext uri="{96DAC541-7B7A-43D3-8B79-37D633B846F1}">
+                <asvg:svgBlip xmlns:asvg="http://schemas.microsoft.com/office/drawing/2016/SVG/main" r:embed="rId6"/>
+              </a:ext>
+            </a:extLst>
+          </a:blip>
+          <a:stretch>
+            <a:fillRect/>
+          </a:stretch>
+        </p:blipFill>
+        <p:spPr>
+          <a:xfrm>
+            <a:off x="4692334" y="3248025"/>
+            <a:ext cx="255085" cy="255091"/>
+          </a:xfrm>
+          <a:prstGeom prst="rect">
+            <a:avLst/>
+          </a:prstGeom>
+        </p:spPr>
+      </p:pic>
+      <p:sp>
+        <p:nvSpPr>
+          <p:cNvPr id="14" name="Text 10"/>
+          <p:cNvSpPr/>
+          <p:nvPr/>
+        </p:nvSpPr>
+        <p:spPr>
+          <a:xfrm>
+            <a:off x="4536366" y="3848100"/>
+            <a:ext cx="3118863" cy="472480"/>
+          </a:xfrm>
+          <a:prstGeom prst="rect">
+            <a:avLst/>
+          </a:prstGeom>
+          <a:noFill/>
+          <a:ln/>
+        </p:spPr>
+        <p:txBody>
+          <a:bodyPr wrap="square" lIns="0" tIns="0" rIns="0" bIns="0" rtlCol="0" anchor="t">
+            <a:normAutofit/>
+          </a:bodyPr>
+          <a:lstStyle/>
+          <a:p>
+            <a:pPr marL="0" indent="0" algn="l">
+              <a:lnSpc>
                 <a:spcPct val="83000"/>
               </a:lnSpc>
               <a:buNone/>
@@ -3650,7 +3679,73 @@
                 <a:ea typeface="DM Sans" pitchFamily="34" charset="-122"/>
                 <a:cs typeface="DM Sans" pitchFamily="34" charset="-120"/>
               </a:rPr>
-              <a:t>Офисный работник, покупает мармелад как подарок коллегам и детям. Бюджет 500–1500 руб. Ищет красивую упаковку и фирменные наборы. Находит магазин через Яндекс.Карты и отзывы на 2ГИС.</a:t>
+              <a:t>Офисный работник, покупает мармелад как подарок коллегам и детям. </a:t>
+            </a:r>
+            <a:r>
+              <a:rPr lang="en-US" sz="1150" dirty="0" err="1">
+                <a:solidFill>
+                  <a:srgbClr val="161616"/>
+                </a:solidFill>
+                <a:latin typeface="DM Sans" pitchFamily="34" charset="0"/>
+                <a:ea typeface="DM Sans" pitchFamily="34" charset="-122"/>
+                <a:cs typeface="DM Sans" pitchFamily="34" charset="-120"/>
+              </a:rPr>
+              <a:t>Бюджет</a:t>
+            </a:r>
+            <a:r>
+              <a:rPr lang="en-US" sz="1150" dirty="0">
+                <a:solidFill>
+                  <a:srgbClr val="161616"/>
+                </a:solidFill>
+                <a:latin typeface="DM Sans" pitchFamily="34" charset="0"/>
+                <a:ea typeface="DM Sans" pitchFamily="34" charset="-122"/>
+                <a:cs typeface="DM Sans" pitchFamily="34" charset="-120"/>
+              </a:rPr>
+              <a:t> </a:t>
+            </a:r>
+            <a:r>
+              <a:rPr lang="ru-RU" sz="1150" dirty="0">
+                <a:solidFill>
+                  <a:srgbClr val="161616"/>
+                </a:solidFill>
+                <a:latin typeface="DM Sans" pitchFamily="34" charset="0"/>
+                <a:ea typeface="DM Sans" pitchFamily="34" charset="-122"/>
+                <a:cs typeface="DM Sans" pitchFamily="34" charset="-120"/>
+              </a:rPr>
+              <a:t>1</a:t>
+            </a:r>
+            <a:r>
+              <a:rPr lang="en-US" sz="1150" dirty="0">
+                <a:solidFill>
+                  <a:srgbClr val="161616"/>
+                </a:solidFill>
+                <a:latin typeface="DM Sans" pitchFamily="34" charset="0"/>
+                <a:ea typeface="DM Sans" pitchFamily="34" charset="-122"/>
+                <a:cs typeface="DM Sans" pitchFamily="34" charset="-120"/>
+              </a:rPr>
+              <a:t>500 –</a:t>
+            </a:r>
+            <a:r>
+              <a:rPr lang="ru-RU" sz="1150" dirty="0">
+                <a:solidFill>
+                  <a:srgbClr val="161616"/>
+                </a:solidFill>
+                <a:latin typeface="DM Sans" pitchFamily="34" charset="0"/>
+                <a:ea typeface="DM Sans" pitchFamily="34" charset="-122"/>
+                <a:cs typeface="DM Sans" pitchFamily="34" charset="-120"/>
+              </a:rPr>
+              <a:t>5</a:t>
+            </a:r>
+            <a:r>
+              <a:rPr lang="en-US" sz="1150" dirty="0">
+                <a:solidFill>
+                  <a:srgbClr val="161616"/>
+                </a:solidFill>
+                <a:latin typeface="DM Sans" pitchFamily="34" charset="0"/>
+                <a:ea typeface="DM Sans" pitchFamily="34" charset="-122"/>
+                <a:cs typeface="DM Sans" pitchFamily="34" charset="-120"/>
+              </a:rPr>
+              <a:t>000 руб. Ищет красивую упаковку и фирменные наборы. Находит магазин через Яндекс.Карты и отзывы на 2ГИС.</a:t>
             </a:r>
             <a:endParaRPr lang="en-US" sz="1150" dirty="0"/>
           </a:p>
@@ -3709,10 +3804,10 @@
           <p:nvPr/>
         </p:nvPicPr>
         <p:blipFill>
-          <a:blip>
+          <a:blip r:embed="rId7">
             <a:extLst>
               <a:ext uri="{96DAC541-7B7A-43D3-8B79-37D633B846F1}">
-                <asvg:svgBlip xmlns:asvg="http://schemas.microsoft.com/office/drawing/2016/SVG/main" r:embed="rId5"/>
+                <asvg:svgBlip xmlns:asvg="http://schemas.microsoft.com/office/drawing/2016/SVG/main" r:embed="rId8"/>
               </a:ext>
             </a:extLst>
           </a:blip>
@@ -4832,163 +4927,7 @@
           <p:nvPr/>
         </p:nvPicPr>
         <p:blipFill>
-          <a:blip>
-            <a:extLst>
-              <a:ext uri="{96DAC541-7B7A-43D3-8B79-37D633B846F1}">
-                <asvg:svgBlip xmlns:asvg="http://schemas.microsoft.com/office/drawing/2016/SVG/main" r:embed="rId3"/>
-              </a:ext>
-            </a:extLst>
-          </a:blip>
-          <a:stretch>
-            <a:fillRect/>
-          </a:stretch>
-        </p:blipFill>
-        <p:spPr>
-          <a:xfrm>
-            <a:off x="496081" y="1599803"/>
-            <a:ext cx="6581313" cy="850602"/>
-          </a:xfrm>
-          <a:prstGeom prst="rect">
-            <a:avLst/>
-          </a:prstGeom>
-        </p:spPr>
-      </p:pic>
-      <p:sp>
-        <p:nvSpPr>
-          <p:cNvPr id="7" name="Text 4"/>
-          <p:cNvSpPr/>
-          <p:nvPr/>
-        </p:nvSpPr>
-        <p:spPr>
-          <a:xfrm>
-            <a:off x="692331" y="1918791"/>
-            <a:ext cx="212620" cy="212626"/>
-          </a:xfrm>
-          <a:prstGeom prst="rect">
-            <a:avLst/>
-          </a:prstGeom>
-          <a:noFill/>
-          <a:ln/>
-        </p:spPr>
-        <p:txBody>
-          <a:bodyPr wrap="none" lIns="0" tIns="0" rIns="0" bIns="0" rtlCol="0" anchor="ctr"/>
-          <a:lstStyle/>
-          <a:p>
-            <a:pPr marL="0" indent="0" algn="ctr">
-              <a:lnSpc>
-                <a:spcPct val="100000"/>
-              </a:lnSpc>
-              <a:buNone/>
-            </a:pPr>
-            <a:r>
-              <a:rPr lang="en-US" sz="1650" dirty="0">
-                <a:solidFill>
-                  <a:srgbClr val="000000"/>
-                </a:solidFill>
-                <a:latin typeface="DM Sans SemiBold" pitchFamily="34" charset="0"/>
-                <a:ea typeface="DM Sans SemiBold" pitchFamily="34" charset="-122"/>
-                <a:cs typeface="DM Sans SemiBold" pitchFamily="34" charset="-120"/>
-              </a:rPr>
-              <a:t>1</a:t>
-            </a:r>
-            <a:endParaRPr lang="en-US" sz="1650" dirty="0"/>
-          </a:p>
-        </p:txBody>
-      </p:sp>
-      <p:sp>
-        <p:nvSpPr>
-          <p:cNvPr id="8" name="Text 5"/>
-          <p:cNvSpPr/>
-          <p:nvPr/>
-        </p:nvSpPr>
-        <p:spPr>
-          <a:xfrm>
-            <a:off x="1188412" y="1760538"/>
-            <a:ext cx="1772003" cy="177205"/>
-          </a:xfrm>
-          <a:prstGeom prst="rect">
-            <a:avLst/>
-          </a:prstGeom>
-          <a:noFill/>
-          <a:ln/>
-        </p:spPr>
-        <p:txBody>
-          <a:bodyPr wrap="none" lIns="0" tIns="0" rIns="0" bIns="0" rtlCol="0" anchor="t"/>
-          <a:lstStyle/>
-          <a:p>
-            <a:pPr marL="0" indent="0" algn="l">
-              <a:lnSpc>
-                <a:spcPct val="83000"/>
-              </a:lnSpc>
-              <a:buNone/>
-            </a:pPr>
-            <a:r>
-              <a:rPr lang="en-US" sz="1350" dirty="0">
-                <a:solidFill>
-                  <a:srgbClr val="161616"/>
-                </a:solidFill>
-                <a:latin typeface="DM Sans SemiBold" pitchFamily="34" charset="0"/>
-                <a:ea typeface="DM Sans SemiBold" pitchFamily="34" charset="-122"/>
-                <a:cs typeface="DM Sans SemiBold" pitchFamily="34" charset="-120"/>
-              </a:rPr>
-              <a:t>Конкретная (S)</a:t>
-            </a:r>
-            <a:endParaRPr lang="en-US" sz="1350" dirty="0"/>
-          </a:p>
-        </p:txBody>
-      </p:sp>
-      <p:sp>
-        <p:nvSpPr>
-          <p:cNvPr id="9" name="Text 6"/>
-          <p:cNvSpPr/>
-          <p:nvPr/>
-        </p:nvSpPr>
-        <p:spPr>
-          <a:xfrm>
-            <a:off x="1188412" y="2044005"/>
-            <a:ext cx="5728251" cy="198438"/>
-          </a:xfrm>
-          <a:prstGeom prst="rect">
-            <a:avLst/>
-          </a:prstGeom>
-          <a:noFill/>
-          <a:ln/>
-        </p:spPr>
-        <p:txBody>
-          <a:bodyPr wrap="none" lIns="0" tIns="0" rIns="0" bIns="0" rtlCol="0" anchor="t"/>
-          <a:lstStyle/>
-          <a:p>
-            <a:pPr marL="0" indent="0" algn="l">
-              <a:lnSpc>
-                <a:spcPct val="117000"/>
-              </a:lnSpc>
-              <a:buNone/>
-            </a:pPr>
-            <a:r>
-              <a:rPr lang="en-US" sz="1100" dirty="0">
-                <a:solidFill>
-                  <a:srgbClr val="161616"/>
-                </a:solidFill>
-                <a:latin typeface="DM Sans" pitchFamily="34" charset="0"/>
-                <a:ea typeface="DM Sans" pitchFamily="34" charset="-122"/>
-                <a:cs typeface="DM Sans" pitchFamily="34" charset="-120"/>
-              </a:rPr>
-              <a:t>Увеличить число заказов через Telegram-бот магазина «Мармеладный рай»</a:t>
-            </a:r>
-            <a:endParaRPr lang="en-US" sz="1100" dirty="0"/>
-          </a:p>
-        </p:txBody>
-      </p:sp>
-      <p:pic>
-        <p:nvPicPr>
-          <p:cNvPr id="10" name="Image 1" descr="preencoded.png"/>
-          <p:cNvPicPr>
-            <a:picLocks noChangeAspect="1"/>
-          </p:cNvPicPr>
-          <p:nvPr/>
-        </p:nvPicPr>
-        <p:blipFill>
-          <a:blip>
+          <a:blip r:embed="rId3">
             <a:extLst>
               <a:ext uri="{96DAC541-7B7A-43D3-8B79-37D633B846F1}">
                 <asvg:svgBlip xmlns:asvg="http://schemas.microsoft.com/office/drawing/2016/SVG/main" r:embed="rId4"/>
@@ -5001,7 +4940,7 @@
         </p:blipFill>
         <p:spPr>
           <a:xfrm>
-            <a:off x="496081" y="2556669"/>
+            <a:off x="496081" y="1599803"/>
             <a:ext cx="6581313" cy="850602"/>
           </a:xfrm>
           <a:prstGeom prst="rect">
@@ -5011,13 +4950,13 @@
       </p:pic>
       <p:sp>
         <p:nvSpPr>
-          <p:cNvPr id="11" name="Text 7"/>
-          <p:cNvSpPr/>
-          <p:nvPr/>
-        </p:nvSpPr>
-        <p:spPr>
-          <a:xfrm>
-            <a:off x="692331" y="2875657"/>
+          <p:cNvPr id="7" name="Text 4"/>
+          <p:cNvSpPr/>
+          <p:nvPr/>
+        </p:nvSpPr>
+        <p:spPr>
+          <a:xfrm>
+            <a:off x="692331" y="1918791"/>
             <a:ext cx="212620" cy="212626"/>
           </a:xfrm>
           <a:prstGeom prst="rect">
@@ -5045,7 +4984,7 @@
                 <a:ea typeface="DM Sans SemiBold" pitchFamily="34" charset="-122"/>
                 <a:cs typeface="DM Sans SemiBold" pitchFamily="34" charset="-120"/>
               </a:rPr>
-              <a:t>2</a:t>
+              <a:t>1</a:t>
             </a:r>
             <a:endParaRPr lang="en-US" sz="1650" dirty="0"/>
           </a:p>
@@ -5053,13 +4992,13 @@
       </p:sp>
       <p:sp>
         <p:nvSpPr>
-          <p:cNvPr id="12" name="Text 8"/>
-          <p:cNvSpPr/>
-          <p:nvPr/>
-        </p:nvSpPr>
-        <p:spPr>
-          <a:xfrm>
-            <a:off x="1188412" y="2717403"/>
+          <p:cNvPr id="8" name="Text 5"/>
+          <p:cNvSpPr/>
+          <p:nvPr/>
+        </p:nvSpPr>
+        <p:spPr>
+          <a:xfrm>
+            <a:off x="1188412" y="1760538"/>
             <a:ext cx="1772003" cy="177205"/>
           </a:xfrm>
           <a:prstGeom prst="rect">
@@ -5087,7 +5026,7 @@
                 <a:ea typeface="DM Sans SemiBold" pitchFamily="34" charset="-122"/>
                 <a:cs typeface="DM Sans SemiBold" pitchFamily="34" charset="-120"/>
               </a:rPr>
-              <a:t>Измеримая (M)</a:t>
+              <a:t>Конкретная (S)</a:t>
             </a:r>
             <a:endParaRPr lang="en-US" sz="1350" dirty="0"/>
           </a:p>
@@ -5095,13 +5034,13 @@
       </p:sp>
       <p:sp>
         <p:nvSpPr>
-          <p:cNvPr id="13" name="Text 9"/>
-          <p:cNvSpPr/>
-          <p:nvPr/>
-        </p:nvSpPr>
-        <p:spPr>
-          <a:xfrm>
-            <a:off x="1188412" y="3000871"/>
+          <p:cNvPr id="9" name="Text 6"/>
+          <p:cNvSpPr/>
+          <p:nvPr/>
+        </p:nvSpPr>
+        <p:spPr>
+          <a:xfrm>
+            <a:off x="1188412" y="2044005"/>
             <a:ext cx="5728251" cy="198438"/>
           </a:xfrm>
           <a:prstGeom prst="rect">
@@ -5129,7 +5068,7 @@
                 <a:ea typeface="DM Sans" pitchFamily="34" charset="-122"/>
                 <a:cs typeface="DM Sans" pitchFamily="34" charset="-120"/>
               </a:rPr>
-              <a:t>С 3 до 10 заказов в неделю через бот</a:t>
+              <a:t>Увеличить число заказов через Telegram-бот магазина «Мармеладный рай»</a:t>
             </a:r>
             <a:endParaRPr lang="en-US" sz="1100" dirty="0"/>
           </a:p>
@@ -5137,170 +5076,14 @@
       </p:sp>
       <p:pic>
         <p:nvPicPr>
-          <p:cNvPr id="14" name="Image 2" descr="preencoded.png"/>
+          <p:cNvPr id="10" name="Image 1" descr="preencoded.png"/>
           <p:cNvPicPr>
             <a:picLocks noChangeAspect="1"/>
           </p:cNvPicPr>
           <p:nvPr/>
         </p:nvPicPr>
         <p:blipFill>
-          <a:blip>
-            <a:extLst>
-              <a:ext uri="{96DAC541-7B7A-43D3-8B79-37D633B846F1}">
-                <asvg:svgBlip xmlns:asvg="http://schemas.microsoft.com/office/drawing/2016/SVG/main" r:embed="rId5"/>
-              </a:ext>
-            </a:extLst>
-          </a:blip>
-          <a:stretch>
-            <a:fillRect/>
-          </a:stretch>
-        </p:blipFill>
-        <p:spPr>
-          <a:xfrm>
-            <a:off x="496081" y="3513534"/>
-            <a:ext cx="6581313" cy="850602"/>
-          </a:xfrm>
-          <a:prstGeom prst="rect">
-            <a:avLst/>
-          </a:prstGeom>
-        </p:spPr>
-      </p:pic>
-      <p:sp>
-        <p:nvSpPr>
-          <p:cNvPr id="15" name="Text 10"/>
-          <p:cNvSpPr/>
-          <p:nvPr/>
-        </p:nvSpPr>
-        <p:spPr>
-          <a:xfrm>
-            <a:off x="692331" y="3832523"/>
-            <a:ext cx="212620" cy="212626"/>
-          </a:xfrm>
-          <a:prstGeom prst="rect">
-            <a:avLst/>
-          </a:prstGeom>
-          <a:noFill/>
-          <a:ln/>
-        </p:spPr>
-        <p:txBody>
-          <a:bodyPr wrap="none" lIns="0" tIns="0" rIns="0" bIns="0" rtlCol="0" anchor="ctr"/>
-          <a:lstStyle/>
-          <a:p>
-            <a:pPr marL="0" indent="0" algn="ctr">
-              <a:lnSpc>
-                <a:spcPct val="100000"/>
-              </a:lnSpc>
-              <a:buNone/>
-            </a:pPr>
-            <a:r>
-              <a:rPr lang="en-US" sz="1650" dirty="0">
-                <a:solidFill>
-                  <a:srgbClr val="000000"/>
-                </a:solidFill>
-                <a:latin typeface="DM Sans SemiBold" pitchFamily="34" charset="0"/>
-                <a:ea typeface="DM Sans SemiBold" pitchFamily="34" charset="-122"/>
-                <a:cs typeface="DM Sans SemiBold" pitchFamily="34" charset="-120"/>
-              </a:rPr>
-              <a:t>3</a:t>
-            </a:r>
-            <a:endParaRPr lang="en-US" sz="1650" dirty="0"/>
-          </a:p>
-        </p:txBody>
-      </p:sp>
-      <p:sp>
-        <p:nvSpPr>
-          <p:cNvPr id="16" name="Text 11"/>
-          <p:cNvSpPr/>
-          <p:nvPr/>
-        </p:nvSpPr>
-        <p:spPr>
-          <a:xfrm>
-            <a:off x="1188412" y="3674269"/>
-            <a:ext cx="1772003" cy="177205"/>
-          </a:xfrm>
-          <a:prstGeom prst="rect">
-            <a:avLst/>
-          </a:prstGeom>
-          <a:noFill/>
-          <a:ln/>
-        </p:spPr>
-        <p:txBody>
-          <a:bodyPr wrap="none" lIns="0" tIns="0" rIns="0" bIns="0" rtlCol="0" anchor="t"/>
-          <a:lstStyle/>
-          <a:p>
-            <a:pPr marL="0" indent="0" algn="l">
-              <a:lnSpc>
-                <a:spcPct val="83000"/>
-              </a:lnSpc>
-              <a:buNone/>
-            </a:pPr>
-            <a:r>
-              <a:rPr lang="en-US" sz="1350" dirty="0">
-                <a:solidFill>
-                  <a:srgbClr val="161616"/>
-                </a:solidFill>
-                <a:latin typeface="DM Sans SemiBold" pitchFamily="34" charset="0"/>
-                <a:ea typeface="DM Sans SemiBold" pitchFamily="34" charset="-122"/>
-                <a:cs typeface="DM Sans SemiBold" pitchFamily="34" charset="-120"/>
-              </a:rPr>
-              <a:t>Достижимая (A)</a:t>
-            </a:r>
-            <a:endParaRPr lang="en-US" sz="1350" dirty="0"/>
-          </a:p>
-        </p:txBody>
-      </p:sp>
-      <p:sp>
-        <p:nvSpPr>
-          <p:cNvPr id="17" name="Text 12"/>
-          <p:cNvSpPr/>
-          <p:nvPr/>
-        </p:nvSpPr>
-        <p:spPr>
-          <a:xfrm>
-            <a:off x="1188412" y="3957737"/>
-            <a:ext cx="5728251" cy="198438"/>
-          </a:xfrm>
-          <a:prstGeom prst="rect">
-            <a:avLst/>
-          </a:prstGeom>
-          <a:noFill/>
-          <a:ln/>
-        </p:spPr>
-        <p:txBody>
-          <a:bodyPr wrap="none" lIns="0" tIns="0" rIns="0" bIns="0" rtlCol="0" anchor="t"/>
-          <a:lstStyle/>
-          <a:p>
-            <a:pPr marL="0" indent="0" algn="l">
-              <a:lnSpc>
-                <a:spcPct val="117000"/>
-              </a:lnSpc>
-              <a:buNone/>
-            </a:pPr>
-            <a:r>
-              <a:rPr lang="en-US" sz="1100" dirty="0">
-                <a:solidFill>
-                  <a:srgbClr val="161616"/>
-                </a:solidFill>
-                <a:latin typeface="DM Sans" pitchFamily="34" charset="0"/>
-                <a:ea typeface="DM Sans" pitchFamily="34" charset="-122"/>
-                <a:cs typeface="DM Sans" pitchFamily="34" charset="-120"/>
-              </a:rPr>
-              <a:t>Настроить бота, запустить таргет в ВКонтакте на район</a:t>
-            </a:r>
-            <a:endParaRPr lang="en-US" sz="1100" dirty="0"/>
-          </a:p>
-        </p:txBody>
-      </p:sp>
-      <p:pic>
-        <p:nvPicPr>
-          <p:cNvPr id="18" name="Image 3" descr="preencoded.png"/>
-          <p:cNvPicPr>
-            <a:picLocks noChangeAspect="1"/>
-          </p:cNvPicPr>
-          <p:nvPr/>
-        </p:nvPicPr>
-        <p:blipFill>
-          <a:blip>
+          <a:blip r:embed="rId5">
             <a:extLst>
               <a:ext uri="{96DAC541-7B7A-43D3-8B79-37D633B846F1}">
                 <asvg:svgBlip xmlns:asvg="http://schemas.microsoft.com/office/drawing/2016/SVG/main" r:embed="rId6"/>
@@ -5313,7 +5096,7 @@
         </p:blipFill>
         <p:spPr>
           <a:xfrm>
-            <a:off x="496081" y="4470400"/>
+            <a:off x="496081" y="2556669"/>
             <a:ext cx="6581313" cy="850602"/>
           </a:xfrm>
           <a:prstGeom prst="rect">
@@ -5323,13 +5106,13 @@
       </p:pic>
       <p:sp>
         <p:nvSpPr>
-          <p:cNvPr id="19" name="Text 13"/>
-          <p:cNvSpPr/>
-          <p:nvPr/>
-        </p:nvSpPr>
-        <p:spPr>
-          <a:xfrm>
-            <a:off x="692331" y="4789388"/>
+          <p:cNvPr id="11" name="Text 7"/>
+          <p:cNvSpPr/>
+          <p:nvPr/>
+        </p:nvSpPr>
+        <p:spPr>
+          <a:xfrm>
+            <a:off x="692331" y="2875657"/>
             <a:ext cx="212620" cy="212626"/>
           </a:xfrm>
           <a:prstGeom prst="rect">
@@ -5351,13 +5134,13 @@
             <a:r>
               <a:rPr lang="en-US" sz="1650" dirty="0">
                 <a:solidFill>
-                  <a:srgbClr val="FFFFFF"/>
+                  <a:srgbClr val="000000"/>
                 </a:solidFill>
                 <a:latin typeface="DM Sans SemiBold" pitchFamily="34" charset="0"/>
                 <a:ea typeface="DM Sans SemiBold" pitchFamily="34" charset="-122"/>
                 <a:cs typeface="DM Sans SemiBold" pitchFamily="34" charset="-120"/>
               </a:rPr>
-              <a:t>4</a:t>
+              <a:t>2</a:t>
             </a:r>
             <a:endParaRPr lang="en-US" sz="1650" dirty="0"/>
           </a:p>
@@ -5365,13 +5148,13 @@
       </p:sp>
       <p:sp>
         <p:nvSpPr>
-          <p:cNvPr id="20" name="Text 14"/>
-          <p:cNvSpPr/>
-          <p:nvPr/>
-        </p:nvSpPr>
-        <p:spPr>
-          <a:xfrm>
-            <a:off x="1188412" y="4631134"/>
+          <p:cNvPr id="12" name="Text 8"/>
+          <p:cNvSpPr/>
+          <p:nvPr/>
+        </p:nvSpPr>
+        <p:spPr>
+          <a:xfrm>
+            <a:off x="1188412" y="2717403"/>
             <a:ext cx="1772003" cy="177205"/>
           </a:xfrm>
           <a:prstGeom prst="rect">
@@ -5399,7 +5182,7 @@
                 <a:ea typeface="DM Sans SemiBold" pitchFamily="34" charset="-122"/>
                 <a:cs typeface="DM Sans SemiBold" pitchFamily="34" charset="-120"/>
               </a:rPr>
-              <a:t>Релевантная (R)</a:t>
+              <a:t>Измеримая (M)</a:t>
             </a:r>
             <a:endParaRPr lang="en-US" sz="1350" dirty="0"/>
           </a:p>
@@ -5407,13 +5190,13 @@
       </p:sp>
       <p:sp>
         <p:nvSpPr>
-          <p:cNvPr id="21" name="Text 15"/>
-          <p:cNvSpPr/>
-          <p:nvPr/>
-        </p:nvSpPr>
-        <p:spPr>
-          <a:xfrm>
-            <a:off x="1188412" y="4914602"/>
+          <p:cNvPr id="13" name="Text 9"/>
+          <p:cNvSpPr/>
+          <p:nvPr/>
+        </p:nvSpPr>
+        <p:spPr>
+          <a:xfrm>
+            <a:off x="1188412" y="3000871"/>
             <a:ext cx="5728251" cy="198438"/>
           </a:xfrm>
           <a:prstGeom prst="rect">
@@ -5441,7 +5224,7 @@
                 <a:ea typeface="DM Sans" pitchFamily="34" charset="-122"/>
                 <a:cs typeface="DM Sans" pitchFamily="34" charset="-120"/>
               </a:rPr>
-              <a:t>Напрямую влияет на выручку и лояльность</a:t>
+              <a:t>С 3 до 10 заказов в неделю через бот</a:t>
             </a:r>
             <a:endParaRPr lang="en-US" sz="1100" dirty="0"/>
           </a:p>
@@ -5449,17 +5232,17 @@
       </p:sp>
       <p:pic>
         <p:nvPicPr>
-          <p:cNvPr id="22" name="Image 4" descr="preencoded.png"/>
+          <p:cNvPr id="14" name="Image 2" descr="preencoded.png"/>
           <p:cNvPicPr>
             <a:picLocks noChangeAspect="1"/>
           </p:cNvPicPr>
           <p:nvPr/>
         </p:nvPicPr>
         <p:blipFill>
-          <a:blip>
+          <a:blip r:embed="rId7">
             <a:extLst>
               <a:ext uri="{96DAC541-7B7A-43D3-8B79-37D633B846F1}">
-                <asvg:svgBlip xmlns:asvg="http://schemas.microsoft.com/office/drawing/2016/SVG/main" r:embed="rId3"/>
+                <asvg:svgBlip xmlns:asvg="http://schemas.microsoft.com/office/drawing/2016/SVG/main" r:embed="rId8"/>
               </a:ext>
             </a:extLst>
           </a:blip>
@@ -5469,6 +5252,318 @@
         </p:blipFill>
         <p:spPr>
           <a:xfrm>
+            <a:off x="496081" y="3513534"/>
+            <a:ext cx="6581313" cy="850602"/>
+          </a:xfrm>
+          <a:prstGeom prst="rect">
+            <a:avLst/>
+          </a:prstGeom>
+        </p:spPr>
+      </p:pic>
+      <p:sp>
+        <p:nvSpPr>
+          <p:cNvPr id="15" name="Text 10"/>
+          <p:cNvSpPr/>
+          <p:nvPr/>
+        </p:nvSpPr>
+        <p:spPr>
+          <a:xfrm>
+            <a:off x="692331" y="3832523"/>
+            <a:ext cx="212620" cy="212626"/>
+          </a:xfrm>
+          <a:prstGeom prst="rect">
+            <a:avLst/>
+          </a:prstGeom>
+          <a:noFill/>
+          <a:ln/>
+        </p:spPr>
+        <p:txBody>
+          <a:bodyPr wrap="none" lIns="0" tIns="0" rIns="0" bIns="0" rtlCol="0" anchor="ctr"/>
+          <a:lstStyle/>
+          <a:p>
+            <a:pPr marL="0" indent="0" algn="ctr">
+              <a:lnSpc>
+                <a:spcPct val="100000"/>
+              </a:lnSpc>
+              <a:buNone/>
+            </a:pPr>
+            <a:r>
+              <a:rPr lang="en-US" sz="1650" dirty="0">
+                <a:solidFill>
+                  <a:srgbClr val="000000"/>
+                </a:solidFill>
+                <a:latin typeface="DM Sans SemiBold" pitchFamily="34" charset="0"/>
+                <a:ea typeface="DM Sans SemiBold" pitchFamily="34" charset="-122"/>
+                <a:cs typeface="DM Sans SemiBold" pitchFamily="34" charset="-120"/>
+              </a:rPr>
+              <a:t>3</a:t>
+            </a:r>
+            <a:endParaRPr lang="en-US" sz="1650" dirty="0"/>
+          </a:p>
+        </p:txBody>
+      </p:sp>
+      <p:sp>
+        <p:nvSpPr>
+          <p:cNvPr id="16" name="Text 11"/>
+          <p:cNvSpPr/>
+          <p:nvPr/>
+        </p:nvSpPr>
+        <p:spPr>
+          <a:xfrm>
+            <a:off x="1188412" y="3674269"/>
+            <a:ext cx="1772003" cy="177205"/>
+          </a:xfrm>
+          <a:prstGeom prst="rect">
+            <a:avLst/>
+          </a:prstGeom>
+          <a:noFill/>
+          <a:ln/>
+        </p:spPr>
+        <p:txBody>
+          <a:bodyPr wrap="none" lIns="0" tIns="0" rIns="0" bIns="0" rtlCol="0" anchor="t"/>
+          <a:lstStyle/>
+          <a:p>
+            <a:pPr marL="0" indent="0" algn="l">
+              <a:lnSpc>
+                <a:spcPct val="83000"/>
+              </a:lnSpc>
+              <a:buNone/>
+            </a:pPr>
+            <a:r>
+              <a:rPr lang="en-US" sz="1350" dirty="0">
+                <a:solidFill>
+                  <a:srgbClr val="161616"/>
+                </a:solidFill>
+                <a:latin typeface="DM Sans SemiBold" pitchFamily="34" charset="0"/>
+                <a:ea typeface="DM Sans SemiBold" pitchFamily="34" charset="-122"/>
+                <a:cs typeface="DM Sans SemiBold" pitchFamily="34" charset="-120"/>
+              </a:rPr>
+              <a:t>Достижимая (A)</a:t>
+            </a:r>
+            <a:endParaRPr lang="en-US" sz="1350" dirty="0"/>
+          </a:p>
+        </p:txBody>
+      </p:sp>
+      <p:sp>
+        <p:nvSpPr>
+          <p:cNvPr id="17" name="Text 12"/>
+          <p:cNvSpPr/>
+          <p:nvPr/>
+        </p:nvSpPr>
+        <p:spPr>
+          <a:xfrm>
+            <a:off x="1188412" y="3957737"/>
+            <a:ext cx="5728251" cy="198438"/>
+          </a:xfrm>
+          <a:prstGeom prst="rect">
+            <a:avLst/>
+          </a:prstGeom>
+          <a:noFill/>
+          <a:ln/>
+        </p:spPr>
+        <p:txBody>
+          <a:bodyPr wrap="none" lIns="0" tIns="0" rIns="0" bIns="0" rtlCol="0" anchor="t"/>
+          <a:lstStyle/>
+          <a:p>
+            <a:pPr marL="0" indent="0" algn="l">
+              <a:lnSpc>
+                <a:spcPct val="117000"/>
+              </a:lnSpc>
+              <a:buNone/>
+            </a:pPr>
+            <a:r>
+              <a:rPr lang="en-US" sz="1100" dirty="0">
+                <a:solidFill>
+                  <a:srgbClr val="161616"/>
+                </a:solidFill>
+                <a:latin typeface="DM Sans" pitchFamily="34" charset="0"/>
+                <a:ea typeface="DM Sans" pitchFamily="34" charset="-122"/>
+                <a:cs typeface="DM Sans" pitchFamily="34" charset="-120"/>
+              </a:rPr>
+              <a:t>Настроить бота, запустить таргет в ВКонтакте на район</a:t>
+            </a:r>
+            <a:endParaRPr lang="en-US" sz="1100" dirty="0"/>
+          </a:p>
+        </p:txBody>
+      </p:sp>
+      <p:pic>
+        <p:nvPicPr>
+          <p:cNvPr id="18" name="Image 3" descr="preencoded.png"/>
+          <p:cNvPicPr>
+            <a:picLocks noChangeAspect="1"/>
+          </p:cNvPicPr>
+          <p:nvPr/>
+        </p:nvPicPr>
+        <p:blipFill>
+          <a:blip r:embed="rId9">
+            <a:extLst>
+              <a:ext uri="{96DAC541-7B7A-43D3-8B79-37D633B846F1}">
+                <asvg:svgBlip xmlns:asvg="http://schemas.microsoft.com/office/drawing/2016/SVG/main" r:embed="rId10"/>
+              </a:ext>
+            </a:extLst>
+          </a:blip>
+          <a:stretch>
+            <a:fillRect/>
+          </a:stretch>
+        </p:blipFill>
+        <p:spPr>
+          <a:xfrm>
+            <a:off x="496081" y="4470400"/>
+            <a:ext cx="6581313" cy="850602"/>
+          </a:xfrm>
+          <a:prstGeom prst="rect">
+            <a:avLst/>
+          </a:prstGeom>
+        </p:spPr>
+      </p:pic>
+      <p:sp>
+        <p:nvSpPr>
+          <p:cNvPr id="19" name="Text 13"/>
+          <p:cNvSpPr/>
+          <p:nvPr/>
+        </p:nvSpPr>
+        <p:spPr>
+          <a:xfrm>
+            <a:off x="692331" y="4789388"/>
+            <a:ext cx="212620" cy="212626"/>
+          </a:xfrm>
+          <a:prstGeom prst="rect">
+            <a:avLst/>
+          </a:prstGeom>
+          <a:noFill/>
+          <a:ln/>
+        </p:spPr>
+        <p:txBody>
+          <a:bodyPr wrap="none" lIns="0" tIns="0" rIns="0" bIns="0" rtlCol="0" anchor="ctr"/>
+          <a:lstStyle/>
+          <a:p>
+            <a:pPr marL="0" indent="0" algn="ctr">
+              <a:lnSpc>
+                <a:spcPct val="100000"/>
+              </a:lnSpc>
+              <a:buNone/>
+            </a:pPr>
+            <a:r>
+              <a:rPr lang="en-US" sz="1650" dirty="0">
+                <a:solidFill>
+                  <a:srgbClr val="FFFFFF"/>
+                </a:solidFill>
+                <a:latin typeface="DM Sans SemiBold" pitchFamily="34" charset="0"/>
+                <a:ea typeface="DM Sans SemiBold" pitchFamily="34" charset="-122"/>
+                <a:cs typeface="DM Sans SemiBold" pitchFamily="34" charset="-120"/>
+              </a:rPr>
+              <a:t>4</a:t>
+            </a:r>
+            <a:endParaRPr lang="en-US" sz="1650" dirty="0"/>
+          </a:p>
+        </p:txBody>
+      </p:sp>
+      <p:sp>
+        <p:nvSpPr>
+          <p:cNvPr id="20" name="Text 14"/>
+          <p:cNvSpPr/>
+          <p:nvPr/>
+        </p:nvSpPr>
+        <p:spPr>
+          <a:xfrm>
+            <a:off x="1188412" y="4631134"/>
+            <a:ext cx="1772003" cy="177205"/>
+          </a:xfrm>
+          <a:prstGeom prst="rect">
+            <a:avLst/>
+          </a:prstGeom>
+          <a:noFill/>
+          <a:ln/>
+        </p:spPr>
+        <p:txBody>
+          <a:bodyPr wrap="none" lIns="0" tIns="0" rIns="0" bIns="0" rtlCol="0" anchor="t"/>
+          <a:lstStyle/>
+          <a:p>
+            <a:pPr marL="0" indent="0" algn="l">
+              <a:lnSpc>
+                <a:spcPct val="83000"/>
+              </a:lnSpc>
+              <a:buNone/>
+            </a:pPr>
+            <a:r>
+              <a:rPr lang="en-US" sz="1350" dirty="0">
+                <a:solidFill>
+                  <a:srgbClr val="161616"/>
+                </a:solidFill>
+                <a:latin typeface="DM Sans SemiBold" pitchFamily="34" charset="0"/>
+                <a:ea typeface="DM Sans SemiBold" pitchFamily="34" charset="-122"/>
+                <a:cs typeface="DM Sans SemiBold" pitchFamily="34" charset="-120"/>
+              </a:rPr>
+              <a:t>Релевантная (R)</a:t>
+            </a:r>
+            <a:endParaRPr lang="en-US" sz="1350" dirty="0"/>
+          </a:p>
+        </p:txBody>
+      </p:sp>
+      <p:sp>
+        <p:nvSpPr>
+          <p:cNvPr id="21" name="Text 15"/>
+          <p:cNvSpPr/>
+          <p:nvPr/>
+        </p:nvSpPr>
+        <p:spPr>
+          <a:xfrm>
+            <a:off x="1188412" y="4914602"/>
+            <a:ext cx="5728251" cy="198438"/>
+          </a:xfrm>
+          <a:prstGeom prst="rect">
+            <a:avLst/>
+          </a:prstGeom>
+          <a:noFill/>
+          <a:ln/>
+        </p:spPr>
+        <p:txBody>
+          <a:bodyPr wrap="none" lIns="0" tIns="0" rIns="0" bIns="0" rtlCol="0" anchor="t"/>
+          <a:lstStyle/>
+          <a:p>
+            <a:pPr marL="0" indent="0" algn="l">
+              <a:lnSpc>
+                <a:spcPct val="117000"/>
+              </a:lnSpc>
+              <a:buNone/>
+            </a:pPr>
+            <a:r>
+              <a:rPr lang="en-US" sz="1100" dirty="0">
+                <a:solidFill>
+                  <a:srgbClr val="161616"/>
+                </a:solidFill>
+                <a:latin typeface="DM Sans" pitchFamily="34" charset="0"/>
+                <a:ea typeface="DM Sans" pitchFamily="34" charset="-122"/>
+                <a:cs typeface="DM Sans" pitchFamily="34" charset="-120"/>
+              </a:rPr>
+              <a:t>Напрямую влияет на выручку и лояльность</a:t>
+            </a:r>
+            <a:endParaRPr lang="en-US" sz="1100" dirty="0"/>
+          </a:p>
+        </p:txBody>
+      </p:sp>
+      <p:pic>
+        <p:nvPicPr>
+          <p:cNvPr id="22" name="Image 4" descr="preencoded.png"/>
+          <p:cNvPicPr>
+            <a:picLocks noChangeAspect="1"/>
+          </p:cNvPicPr>
+          <p:nvPr/>
+        </p:nvPicPr>
+        <p:blipFill>
+          <a:blip r:embed="rId3">
+            <a:extLst>
+              <a:ext uri="{96DAC541-7B7A-43D3-8B79-37D633B846F1}">
+                <asvg:svgBlip xmlns:asvg="http://schemas.microsoft.com/office/drawing/2016/SVG/main" r:embed="rId4"/>
+              </a:ext>
+            </a:extLst>
+          </a:blip>
+          <a:stretch>
+            <a:fillRect/>
+          </a:stretch>
+        </p:blipFill>
+        <p:spPr>
+          <a:xfrm>
             <a:off x="496081" y="5427266"/>
             <a:ext cx="6581313" cy="850602"/>
           </a:xfrm>
@@ -5740,7 +5835,7 @@
           <p:nvPr/>
         </p:nvPicPr>
         <p:blipFill>
-          <a:blip r:embed="rId7"/>
+          <a:blip r:embed="rId11"/>
           <a:stretch>
             <a:fillRect/>
           </a:stretch>
@@ -6850,15 +6945,15 @@
               <a:t>Макет создан в </a:t>
             </a:r>
             <a:r>
-              <a:rPr lang="en-US" sz="1250" b="1" dirty="0">
-                <a:solidFill>
-                  <a:srgbClr val="161616"/>
-                </a:solidFill>
-                <a:latin typeface="DM Sans" pitchFamily="34" charset="0"/>
-                <a:ea typeface="DM Sans" pitchFamily="34" charset="-122"/>
-                <a:cs typeface="DM Sans" pitchFamily="34" charset="-120"/>
-              </a:rPr>
-              <a:t>Canva</a:t>
+              <a:rPr lang="ru-RU" sz="1250" b="1" dirty="0">
+                <a:solidFill>
+                  <a:srgbClr val="161616"/>
+                </a:solidFill>
+                <a:latin typeface="DM Sans" pitchFamily="34" charset="0"/>
+                <a:ea typeface="DM Sans" pitchFamily="34" charset="-122"/>
+                <a:cs typeface="DM Sans" pitchFamily="34" charset="-120"/>
+              </a:rPr>
+              <a:t>ручную</a:t>
             </a:r>
             <a:r>
               <a:rPr lang="en-US" sz="1250" dirty="0">
@@ -7026,7 +7121,7 @@
         </p:nvSpPr>
         <p:spPr>
           <a:xfrm>
-            <a:off x="-10411" y="0"/>
+            <a:off x="0" y="49511"/>
             <a:ext cx="12202411" cy="6858000"/>
           </a:xfrm>
           <a:prstGeom prst="rect">
@@ -7262,7 +7357,7 @@
               <a:buNone/>
             </a:pPr>
             <a:r>
-              <a:rPr lang="en-US" sz="1700" dirty="0">
+              <a:rPr lang="ru-RU" sz="1700" dirty="0">
                 <a:solidFill>
                   <a:srgbClr val="161616"/>
                 </a:solidFill>
@@ -7270,7 +7365,29 @@
                 <a:ea typeface="DM Sans SemiBold" pitchFamily="34" charset="-122"/>
                 <a:cs typeface="DM Sans SemiBold" pitchFamily="34" charset="-120"/>
               </a:rPr>
-              <a:t>On-page SEO: ключевые запросы</a:t>
+              <a:t>     </a:t>
+            </a:r>
+            <a:r>
+              <a:rPr lang="en-US" sz="1700" dirty="0" err="1">
+                <a:solidFill>
+                  <a:srgbClr val="161616"/>
+                </a:solidFill>
+                <a:latin typeface="DM Sans SemiBold" pitchFamily="34" charset="0"/>
+                <a:ea typeface="DM Sans SemiBold" pitchFamily="34" charset="-122"/>
+                <a:cs typeface="DM Sans SemiBold" pitchFamily="34" charset="-120"/>
+              </a:rPr>
+              <a:t>ключевые</a:t>
+            </a:r>
+            <a:r>
+              <a:rPr lang="en-US" sz="1700" dirty="0">
+                <a:solidFill>
+                  <a:srgbClr val="161616"/>
+                </a:solidFill>
+                <a:latin typeface="DM Sans SemiBold" pitchFamily="34" charset="0"/>
+                <a:ea typeface="DM Sans SemiBold" pitchFamily="34" charset="-122"/>
+                <a:cs typeface="DM Sans SemiBold" pitchFamily="34" charset="-120"/>
+              </a:rPr>
+              <a:t> запросы</a:t>
             </a:r>
             <a:endParaRPr lang="en-US" sz="1700" dirty="0"/>
           </a:p>
@@ -8541,7 +8658,7 @@
                 <a:ea typeface="DM Sans SemiBold" pitchFamily="34" charset="-122"/>
                 <a:cs typeface="DM Sans SemiBold" pitchFamily="34" charset="-120"/>
               </a:rPr>
-              <a:t>Off-page SEO: крауд-маркетинг</a:t>
+              <a:t>Off-page SEO:</a:t>
             </a:r>
             <a:endParaRPr lang="en-US" sz="1700" dirty="0"/>
           </a:p>
